--- a/愛使我們相聚一起.pptx
+++ b/愛使我們相聚一起.pptx
@@ -5,10 +5,13 @@
     <p:sldMasterId id="2147483686" r:id="rId1"/>
   </p:sldMasterIdLst>
   <p:sldIdLst>
-    <p:sldId id="257" r:id="rId2"/>
-    <p:sldId id="258" r:id="rId3"/>
+    <p:sldId id="353" r:id="rId2"/>
+    <p:sldId id="390" r:id="rId3"/>
+    <p:sldId id="391" r:id="rId4"/>
+    <p:sldId id="392" r:id="rId5"/>
+    <p:sldId id="393" r:id="rId6"/>
   </p:sldIdLst>
-  <p:sldSz cx="9144000" cy="6858000" type="screen4x3"/>
+  <p:sldSz cx="12192000" cy="6858000"/>
   <p:notesSz cx="6858000" cy="9144000"/>
   <p:defaultTextStyle>
     <a:defPPr>
@@ -105,6 +108,22 @@
       </a:defRPr>
     </a:lvl9pPr>
   </p:defaultTextStyle>
+  <p:extLst>
+    <p:ext uri="{EFAFB233-063F-42B5-8137-9DF3F51BA10A}">
+      <p15:sldGuideLst xmlns:p15="http://schemas.microsoft.com/office/powerpoint/2012/main">
+        <p15:guide id="1" orient="horz" pos="2160" userDrawn="1">
+          <p15:clr>
+            <a:srgbClr val="A4A3A4"/>
+          </p15:clr>
+        </p15:guide>
+        <p15:guide id="2" pos="3840" userDrawn="1">
+          <p15:clr>
+            <a:srgbClr val="A4A3A4"/>
+          </p15:clr>
+        </p15:guide>
+      </p15:sldGuideLst>
+    </p:ext>
+  </p:extLst>
 </p:presentation>
 </file>
 
@@ -137,8 +156,8 @@
         </p:nvSpPr>
         <p:spPr>
           <a:xfrm>
-            <a:off x="685800" y="2130425"/>
-            <a:ext cx="7772400" cy="1470025"/>
+            <a:off x="914400" y="2130426"/>
+            <a:ext cx="10363200" cy="1470025"/>
           </a:xfrm>
         </p:spPr>
         <p:txBody>
@@ -146,10 +165,9 @@
           <a:lstStyle/>
           <a:p>
             <a:r>
-              <a:rPr lang="zh-TW" altLang="en-US" smtClean="0"/>
+              <a:rPr lang="zh-TW" altLang="en-US"/>
               <a:t>按一下以編輯母片標題樣式</a:t>
             </a:r>
-            <a:endParaRPr lang="zh-TW" altLang="en-US"/>
           </a:p>
         </p:txBody>
       </p:sp>
@@ -165,8 +183,8 @@
         </p:nvSpPr>
         <p:spPr>
           <a:xfrm>
-            <a:off x="1371600" y="3886200"/>
-            <a:ext cx="6400800" cy="1752600"/>
+            <a:off x="1828800" y="3886200"/>
+            <a:ext cx="8534400" cy="1752600"/>
           </a:xfrm>
         </p:spPr>
         <p:txBody>
@@ -265,10 +283,9 @@
           </a:lstStyle>
           <a:p>
             <a:r>
-              <a:rPr lang="zh-TW" altLang="en-US" smtClean="0"/>
+              <a:rPr lang="zh-TW" altLang="en-US"/>
               <a:t>按一下以編輯母片副標題樣式</a:t>
             </a:r>
-            <a:endParaRPr lang="zh-TW" altLang="en-US"/>
           </a:p>
         </p:txBody>
       </p:sp>
@@ -290,7 +307,7 @@
             <a:fld id="{D9E4721A-3BB7-4288-B001-4FB03A7092AD}" type="datetimeFigureOut">
               <a:rPr lang="en-US" smtClean="0"/>
               <a:pPr/>
-              <a:t>5/26/2018</a:t>
+              <a:t>7/19/2025</a:t>
             </a:fld>
             <a:endParaRPr lang="en-US"/>
           </a:p>
@@ -380,10 +397,9 @@
           <a:lstStyle/>
           <a:p>
             <a:r>
-              <a:rPr lang="zh-TW" altLang="en-US" smtClean="0"/>
+              <a:rPr lang="zh-TW" altLang="en-US"/>
               <a:t>按一下以編輯母片標題樣式</a:t>
             </a:r>
-            <a:endParaRPr lang="zh-TW" altLang="en-US"/>
           </a:p>
         </p:txBody>
       </p:sp>
@@ -404,38 +420,37 @@
           <a:p>
             <a:pPr lvl="0"/>
             <a:r>
-              <a:rPr lang="zh-TW" altLang="en-US" smtClean="0"/>
+              <a:rPr lang="zh-TW" altLang="en-US"/>
               <a:t>按一下以編輯母片文字樣式</a:t>
             </a:r>
           </a:p>
           <a:p>
             <a:pPr lvl="1"/>
             <a:r>
-              <a:rPr lang="zh-TW" altLang="en-US" smtClean="0"/>
+              <a:rPr lang="zh-TW" altLang="en-US"/>
               <a:t>第二層</a:t>
             </a:r>
           </a:p>
           <a:p>
             <a:pPr lvl="2"/>
             <a:r>
-              <a:rPr lang="zh-TW" altLang="en-US" smtClean="0"/>
+              <a:rPr lang="zh-TW" altLang="en-US"/>
               <a:t>第三層</a:t>
             </a:r>
           </a:p>
           <a:p>
             <a:pPr lvl="3"/>
             <a:r>
-              <a:rPr lang="zh-TW" altLang="en-US" smtClean="0"/>
+              <a:rPr lang="zh-TW" altLang="en-US"/>
               <a:t>第四層</a:t>
             </a:r>
           </a:p>
           <a:p>
             <a:pPr lvl="4"/>
             <a:r>
-              <a:rPr lang="zh-TW" altLang="en-US" smtClean="0"/>
+              <a:rPr lang="zh-TW" altLang="en-US"/>
               <a:t>第五層</a:t>
             </a:r>
-            <a:endParaRPr lang="zh-TW" altLang="en-US"/>
           </a:p>
         </p:txBody>
       </p:sp>
@@ -457,7 +472,7 @@
             <a:fld id="{D9E4721A-3BB7-4288-B001-4FB03A7092AD}" type="datetimeFigureOut">
               <a:rPr lang="en-US" smtClean="0"/>
               <a:pPr/>
-              <a:t>5/26/2018</a:t>
+              <a:t>7/19/2025</a:t>
             </a:fld>
             <a:endParaRPr lang="en-US"/>
           </a:p>
@@ -543,8 +558,8 @@
         </p:nvSpPr>
         <p:spPr>
           <a:xfrm>
-            <a:off x="6629400" y="274638"/>
-            <a:ext cx="2057400" cy="5851525"/>
+            <a:off x="8839200" y="274639"/>
+            <a:ext cx="2743200" cy="5851525"/>
           </a:xfrm>
         </p:spPr>
         <p:txBody>
@@ -552,10 +567,9 @@
           <a:lstStyle/>
           <a:p>
             <a:r>
-              <a:rPr lang="zh-TW" altLang="en-US" smtClean="0"/>
+              <a:rPr lang="zh-TW" altLang="en-US"/>
               <a:t>按一下以編輯母片標題樣式</a:t>
             </a:r>
-            <a:endParaRPr lang="zh-TW" altLang="en-US"/>
           </a:p>
         </p:txBody>
       </p:sp>
@@ -571,8 +585,8 @@
         </p:nvSpPr>
         <p:spPr>
           <a:xfrm>
-            <a:off x="457200" y="274638"/>
-            <a:ext cx="6019800" cy="5851525"/>
+            <a:off x="609600" y="274639"/>
+            <a:ext cx="8026400" cy="5851525"/>
           </a:xfrm>
         </p:spPr>
         <p:txBody>
@@ -581,38 +595,37 @@
           <a:p>
             <a:pPr lvl="0"/>
             <a:r>
-              <a:rPr lang="zh-TW" altLang="en-US" smtClean="0"/>
+              <a:rPr lang="zh-TW" altLang="en-US"/>
               <a:t>按一下以編輯母片文字樣式</a:t>
             </a:r>
           </a:p>
           <a:p>
             <a:pPr lvl="1"/>
             <a:r>
-              <a:rPr lang="zh-TW" altLang="en-US" smtClean="0"/>
+              <a:rPr lang="zh-TW" altLang="en-US"/>
               <a:t>第二層</a:t>
             </a:r>
           </a:p>
           <a:p>
             <a:pPr lvl="2"/>
             <a:r>
-              <a:rPr lang="zh-TW" altLang="en-US" smtClean="0"/>
+              <a:rPr lang="zh-TW" altLang="en-US"/>
               <a:t>第三層</a:t>
             </a:r>
           </a:p>
           <a:p>
             <a:pPr lvl="3"/>
             <a:r>
-              <a:rPr lang="zh-TW" altLang="en-US" smtClean="0"/>
+              <a:rPr lang="zh-TW" altLang="en-US"/>
               <a:t>第四層</a:t>
             </a:r>
           </a:p>
           <a:p>
             <a:pPr lvl="4"/>
             <a:r>
-              <a:rPr lang="zh-TW" altLang="en-US" smtClean="0"/>
+              <a:rPr lang="zh-TW" altLang="en-US"/>
               <a:t>第五層</a:t>
             </a:r>
-            <a:endParaRPr lang="zh-TW" altLang="en-US"/>
           </a:p>
         </p:txBody>
       </p:sp>
@@ -634,7 +647,7 @@
             <a:fld id="{D9E4721A-3BB7-4288-B001-4FB03A7092AD}" type="datetimeFigureOut">
               <a:rPr lang="en-US" smtClean="0"/>
               <a:pPr/>
-              <a:t>5/26/2018</a:t>
+              <a:t>7/19/2025</a:t>
             </a:fld>
             <a:endParaRPr lang="en-US"/>
           </a:p>
@@ -724,10 +737,9 @@
           <a:lstStyle/>
           <a:p>
             <a:r>
-              <a:rPr lang="zh-TW" altLang="en-US" smtClean="0"/>
+              <a:rPr lang="zh-TW" altLang="en-US"/>
               <a:t>按一下以編輯母片標題樣式</a:t>
             </a:r>
-            <a:endParaRPr lang="zh-TW" altLang="en-US"/>
           </a:p>
         </p:txBody>
       </p:sp>
@@ -748,38 +760,37 @@
           <a:p>
             <a:pPr lvl="0"/>
             <a:r>
-              <a:rPr lang="zh-TW" altLang="en-US" smtClean="0"/>
+              <a:rPr lang="zh-TW" altLang="en-US"/>
               <a:t>按一下以編輯母片文字樣式</a:t>
             </a:r>
           </a:p>
           <a:p>
             <a:pPr lvl="1"/>
             <a:r>
-              <a:rPr lang="zh-TW" altLang="en-US" smtClean="0"/>
+              <a:rPr lang="zh-TW" altLang="en-US"/>
               <a:t>第二層</a:t>
             </a:r>
           </a:p>
           <a:p>
             <a:pPr lvl="2"/>
             <a:r>
-              <a:rPr lang="zh-TW" altLang="en-US" smtClean="0"/>
+              <a:rPr lang="zh-TW" altLang="en-US"/>
               <a:t>第三層</a:t>
             </a:r>
           </a:p>
           <a:p>
             <a:pPr lvl="3"/>
             <a:r>
-              <a:rPr lang="zh-TW" altLang="en-US" smtClean="0"/>
+              <a:rPr lang="zh-TW" altLang="en-US"/>
               <a:t>第四層</a:t>
             </a:r>
           </a:p>
           <a:p>
             <a:pPr lvl="4"/>
             <a:r>
-              <a:rPr lang="zh-TW" altLang="en-US" smtClean="0"/>
+              <a:rPr lang="zh-TW" altLang="en-US"/>
               <a:t>第五層</a:t>
             </a:r>
-            <a:endParaRPr lang="zh-TW" altLang="en-US"/>
           </a:p>
         </p:txBody>
       </p:sp>
@@ -801,7 +812,7 @@
             <a:fld id="{D9E4721A-3BB7-4288-B001-4FB03A7092AD}" type="datetimeFigureOut">
               <a:rPr lang="en-US" smtClean="0"/>
               <a:pPr/>
-              <a:t>5/26/2018</a:t>
+              <a:t>7/19/2025</a:t>
             </a:fld>
             <a:endParaRPr lang="en-US"/>
           </a:p>
@@ -887,8 +898,8 @@
         </p:nvSpPr>
         <p:spPr>
           <a:xfrm>
-            <a:off x="722313" y="4406900"/>
-            <a:ext cx="7772400" cy="1362075"/>
+            <a:off x="963084" y="4406901"/>
+            <a:ext cx="10363200" cy="1362075"/>
           </a:xfrm>
         </p:spPr>
         <p:txBody>
@@ -900,10 +911,9 @@
           </a:lstStyle>
           <a:p>
             <a:r>
-              <a:rPr lang="zh-TW" altLang="en-US" smtClean="0"/>
+              <a:rPr lang="zh-TW" altLang="en-US"/>
               <a:t>按一下以編輯母片標題樣式</a:t>
             </a:r>
-            <a:endParaRPr lang="zh-TW" altLang="en-US"/>
           </a:p>
         </p:txBody>
       </p:sp>
@@ -919,8 +929,8 @@
         </p:nvSpPr>
         <p:spPr>
           <a:xfrm>
-            <a:off x="722313" y="2906713"/>
-            <a:ext cx="7772400" cy="1500187"/>
+            <a:off x="963084" y="2906713"/>
+            <a:ext cx="10363200" cy="1500187"/>
           </a:xfrm>
         </p:spPr>
         <p:txBody>
@@ -1020,7 +1030,7 @@
           <a:p>
             <a:pPr lvl="0"/>
             <a:r>
-              <a:rPr lang="zh-TW" altLang="en-US" smtClean="0"/>
+              <a:rPr lang="zh-TW" altLang="en-US"/>
               <a:t>按一下以編輯母片文字樣式</a:t>
             </a:r>
           </a:p>
@@ -1044,7 +1054,7 @@
             <a:fld id="{D9E4721A-3BB7-4288-B001-4FB03A7092AD}" type="datetimeFigureOut">
               <a:rPr lang="en-US" smtClean="0"/>
               <a:pPr/>
-              <a:t>5/26/2018</a:t>
+              <a:t>7/19/2025</a:t>
             </a:fld>
             <a:endParaRPr lang="en-US"/>
           </a:p>
@@ -1134,10 +1144,9 @@
           <a:lstStyle/>
           <a:p>
             <a:r>
-              <a:rPr lang="zh-TW" altLang="en-US" smtClean="0"/>
+              <a:rPr lang="zh-TW" altLang="en-US"/>
               <a:t>按一下以編輯母片標題樣式</a:t>
             </a:r>
-            <a:endParaRPr lang="zh-TW" altLang="en-US"/>
           </a:p>
         </p:txBody>
       </p:sp>
@@ -1153,8 +1162,8 @@
         </p:nvSpPr>
         <p:spPr>
           <a:xfrm>
-            <a:off x="457200" y="1600200"/>
-            <a:ext cx="4038600" cy="4525963"/>
+            <a:off x="609600" y="1600201"/>
+            <a:ext cx="5384800" cy="4525963"/>
           </a:xfrm>
         </p:spPr>
         <p:txBody>
@@ -1191,38 +1200,37 @@
           <a:p>
             <a:pPr lvl="0"/>
             <a:r>
-              <a:rPr lang="zh-TW" altLang="en-US" smtClean="0"/>
+              <a:rPr lang="zh-TW" altLang="en-US"/>
               <a:t>按一下以編輯母片文字樣式</a:t>
             </a:r>
           </a:p>
           <a:p>
             <a:pPr lvl="1"/>
             <a:r>
-              <a:rPr lang="zh-TW" altLang="en-US" smtClean="0"/>
+              <a:rPr lang="zh-TW" altLang="en-US"/>
               <a:t>第二層</a:t>
             </a:r>
           </a:p>
           <a:p>
             <a:pPr lvl="2"/>
             <a:r>
-              <a:rPr lang="zh-TW" altLang="en-US" smtClean="0"/>
+              <a:rPr lang="zh-TW" altLang="en-US"/>
               <a:t>第三層</a:t>
             </a:r>
           </a:p>
           <a:p>
             <a:pPr lvl="3"/>
             <a:r>
-              <a:rPr lang="zh-TW" altLang="en-US" smtClean="0"/>
+              <a:rPr lang="zh-TW" altLang="en-US"/>
               <a:t>第四層</a:t>
             </a:r>
           </a:p>
           <a:p>
             <a:pPr lvl="4"/>
             <a:r>
-              <a:rPr lang="zh-TW" altLang="en-US" smtClean="0"/>
+              <a:rPr lang="zh-TW" altLang="en-US"/>
               <a:t>第五層</a:t>
             </a:r>
-            <a:endParaRPr lang="zh-TW" altLang="en-US"/>
           </a:p>
         </p:txBody>
       </p:sp>
@@ -1238,8 +1246,8 @@
         </p:nvSpPr>
         <p:spPr>
           <a:xfrm>
-            <a:off x="4648200" y="1600200"/>
-            <a:ext cx="4038600" cy="4525963"/>
+            <a:off x="6197600" y="1600201"/>
+            <a:ext cx="5384800" cy="4525963"/>
           </a:xfrm>
         </p:spPr>
         <p:txBody>
@@ -1276,38 +1284,37 @@
           <a:p>
             <a:pPr lvl="0"/>
             <a:r>
-              <a:rPr lang="zh-TW" altLang="en-US" smtClean="0"/>
+              <a:rPr lang="zh-TW" altLang="en-US"/>
               <a:t>按一下以編輯母片文字樣式</a:t>
             </a:r>
           </a:p>
           <a:p>
             <a:pPr lvl="1"/>
             <a:r>
-              <a:rPr lang="zh-TW" altLang="en-US" smtClean="0"/>
+              <a:rPr lang="zh-TW" altLang="en-US"/>
               <a:t>第二層</a:t>
             </a:r>
           </a:p>
           <a:p>
             <a:pPr lvl="2"/>
             <a:r>
-              <a:rPr lang="zh-TW" altLang="en-US" smtClean="0"/>
+              <a:rPr lang="zh-TW" altLang="en-US"/>
               <a:t>第三層</a:t>
             </a:r>
           </a:p>
           <a:p>
             <a:pPr lvl="3"/>
             <a:r>
-              <a:rPr lang="zh-TW" altLang="en-US" smtClean="0"/>
+              <a:rPr lang="zh-TW" altLang="en-US"/>
               <a:t>第四層</a:t>
             </a:r>
           </a:p>
           <a:p>
             <a:pPr lvl="4"/>
             <a:r>
-              <a:rPr lang="zh-TW" altLang="en-US" smtClean="0"/>
+              <a:rPr lang="zh-TW" altLang="en-US"/>
               <a:t>第五層</a:t>
             </a:r>
-            <a:endParaRPr lang="zh-TW" altLang="en-US"/>
           </a:p>
         </p:txBody>
       </p:sp>
@@ -1329,7 +1336,7 @@
             <a:fld id="{D9E4721A-3BB7-4288-B001-4FB03A7092AD}" type="datetimeFigureOut">
               <a:rPr lang="en-US" smtClean="0"/>
               <a:pPr/>
-              <a:t>5/26/2018</a:t>
+              <a:t>7/19/2025</a:t>
             </a:fld>
             <a:endParaRPr lang="en-US"/>
           </a:p>
@@ -1423,10 +1430,9 @@
           </a:lstStyle>
           <a:p>
             <a:r>
-              <a:rPr lang="zh-TW" altLang="en-US" smtClean="0"/>
+              <a:rPr lang="zh-TW" altLang="en-US"/>
               <a:t>按一下以編輯母片標題樣式</a:t>
             </a:r>
-            <a:endParaRPr lang="zh-TW" altLang="en-US"/>
           </a:p>
         </p:txBody>
       </p:sp>
@@ -1442,8 +1448,8 @@
         </p:nvSpPr>
         <p:spPr>
           <a:xfrm>
-            <a:off x="457200" y="1535113"/>
-            <a:ext cx="4040188" cy="639762"/>
+            <a:off x="609600" y="1535113"/>
+            <a:ext cx="5386917" cy="639762"/>
           </a:xfrm>
         </p:spPr>
         <p:txBody>
@@ -1489,7 +1495,7 @@
           <a:p>
             <a:pPr lvl="0"/>
             <a:r>
-              <a:rPr lang="zh-TW" altLang="en-US" smtClean="0"/>
+              <a:rPr lang="zh-TW" altLang="en-US"/>
               <a:t>按一下以編輯母片文字樣式</a:t>
             </a:r>
           </a:p>
@@ -1507,8 +1513,8 @@
         </p:nvSpPr>
         <p:spPr>
           <a:xfrm>
-            <a:off x="457200" y="2174875"/>
-            <a:ext cx="4040188" cy="3951288"/>
+            <a:off x="609600" y="2174875"/>
+            <a:ext cx="5386917" cy="3951288"/>
           </a:xfrm>
         </p:spPr>
         <p:txBody>
@@ -1545,38 +1551,37 @@
           <a:p>
             <a:pPr lvl="0"/>
             <a:r>
-              <a:rPr lang="zh-TW" altLang="en-US" smtClean="0"/>
+              <a:rPr lang="zh-TW" altLang="en-US"/>
               <a:t>按一下以編輯母片文字樣式</a:t>
             </a:r>
           </a:p>
           <a:p>
             <a:pPr lvl="1"/>
             <a:r>
-              <a:rPr lang="zh-TW" altLang="en-US" smtClean="0"/>
+              <a:rPr lang="zh-TW" altLang="en-US"/>
               <a:t>第二層</a:t>
             </a:r>
           </a:p>
           <a:p>
             <a:pPr lvl="2"/>
             <a:r>
-              <a:rPr lang="zh-TW" altLang="en-US" smtClean="0"/>
+              <a:rPr lang="zh-TW" altLang="en-US"/>
               <a:t>第三層</a:t>
             </a:r>
           </a:p>
           <a:p>
             <a:pPr lvl="3"/>
             <a:r>
-              <a:rPr lang="zh-TW" altLang="en-US" smtClean="0"/>
+              <a:rPr lang="zh-TW" altLang="en-US"/>
               <a:t>第四層</a:t>
             </a:r>
           </a:p>
           <a:p>
             <a:pPr lvl="4"/>
             <a:r>
-              <a:rPr lang="zh-TW" altLang="en-US" smtClean="0"/>
+              <a:rPr lang="zh-TW" altLang="en-US"/>
               <a:t>第五層</a:t>
             </a:r>
-            <a:endParaRPr lang="zh-TW" altLang="en-US"/>
           </a:p>
         </p:txBody>
       </p:sp>
@@ -1592,8 +1597,8 @@
         </p:nvSpPr>
         <p:spPr>
           <a:xfrm>
-            <a:off x="4645025" y="1535113"/>
-            <a:ext cx="4041775" cy="639762"/>
+            <a:off x="6193368" y="1535113"/>
+            <a:ext cx="5389033" cy="639762"/>
           </a:xfrm>
         </p:spPr>
         <p:txBody>
@@ -1639,7 +1644,7 @@
           <a:p>
             <a:pPr lvl="0"/>
             <a:r>
-              <a:rPr lang="zh-TW" altLang="en-US" smtClean="0"/>
+              <a:rPr lang="zh-TW" altLang="en-US"/>
               <a:t>按一下以編輯母片文字樣式</a:t>
             </a:r>
           </a:p>
@@ -1657,8 +1662,8 @@
         </p:nvSpPr>
         <p:spPr>
           <a:xfrm>
-            <a:off x="4645025" y="2174875"/>
-            <a:ext cx="4041775" cy="3951288"/>
+            <a:off x="6193368" y="2174875"/>
+            <a:ext cx="5389033" cy="3951288"/>
           </a:xfrm>
         </p:spPr>
         <p:txBody>
@@ -1695,38 +1700,37 @@
           <a:p>
             <a:pPr lvl="0"/>
             <a:r>
-              <a:rPr lang="zh-TW" altLang="en-US" smtClean="0"/>
+              <a:rPr lang="zh-TW" altLang="en-US"/>
               <a:t>按一下以編輯母片文字樣式</a:t>
             </a:r>
           </a:p>
           <a:p>
             <a:pPr lvl="1"/>
             <a:r>
-              <a:rPr lang="zh-TW" altLang="en-US" smtClean="0"/>
+              <a:rPr lang="zh-TW" altLang="en-US"/>
               <a:t>第二層</a:t>
             </a:r>
           </a:p>
           <a:p>
             <a:pPr lvl="2"/>
             <a:r>
-              <a:rPr lang="zh-TW" altLang="en-US" smtClean="0"/>
+              <a:rPr lang="zh-TW" altLang="en-US"/>
               <a:t>第三層</a:t>
             </a:r>
           </a:p>
           <a:p>
             <a:pPr lvl="3"/>
             <a:r>
-              <a:rPr lang="zh-TW" altLang="en-US" smtClean="0"/>
+              <a:rPr lang="zh-TW" altLang="en-US"/>
               <a:t>第四層</a:t>
             </a:r>
           </a:p>
           <a:p>
             <a:pPr lvl="4"/>
             <a:r>
-              <a:rPr lang="zh-TW" altLang="en-US" smtClean="0"/>
+              <a:rPr lang="zh-TW" altLang="en-US"/>
               <a:t>第五層</a:t>
             </a:r>
-            <a:endParaRPr lang="zh-TW" altLang="en-US"/>
           </a:p>
         </p:txBody>
       </p:sp>
@@ -1748,7 +1752,7 @@
             <a:fld id="{D9E4721A-3BB7-4288-B001-4FB03A7092AD}" type="datetimeFigureOut">
               <a:rPr lang="en-US" smtClean="0"/>
               <a:pPr/>
-              <a:t>5/26/2018</a:t>
+              <a:t>7/19/2025</a:t>
             </a:fld>
             <a:endParaRPr lang="en-US"/>
           </a:p>
@@ -1838,10 +1842,9 @@
           <a:lstStyle/>
           <a:p>
             <a:r>
-              <a:rPr lang="zh-TW" altLang="en-US" smtClean="0"/>
+              <a:rPr lang="zh-TW" altLang="en-US"/>
               <a:t>按一下以編輯母片標題樣式</a:t>
             </a:r>
-            <a:endParaRPr lang="zh-TW" altLang="en-US"/>
           </a:p>
         </p:txBody>
       </p:sp>
@@ -1863,7 +1866,7 @@
             <a:fld id="{D9E4721A-3BB7-4288-B001-4FB03A7092AD}" type="datetimeFigureOut">
               <a:rPr lang="en-US" smtClean="0"/>
               <a:pPr/>
-              <a:t>5/26/2018</a:t>
+              <a:t>7/19/2025</a:t>
             </a:fld>
             <a:endParaRPr lang="en-US"/>
           </a:p>
@@ -1955,7 +1958,7 @@
             <a:fld id="{D9E4721A-3BB7-4288-B001-4FB03A7092AD}" type="datetimeFigureOut">
               <a:rPr lang="en-US" smtClean="0"/>
               <a:pPr/>
-              <a:t>5/26/2018</a:t>
+              <a:t>7/19/2025</a:t>
             </a:fld>
             <a:endParaRPr lang="en-US"/>
           </a:p>
@@ -2041,8 +2044,8 @@
         </p:nvSpPr>
         <p:spPr>
           <a:xfrm>
-            <a:off x="457200" y="273050"/>
-            <a:ext cx="3008313" cy="1162050"/>
+            <a:off x="609601" y="273050"/>
+            <a:ext cx="4011084" cy="1162050"/>
           </a:xfrm>
         </p:spPr>
         <p:txBody>
@@ -2054,10 +2057,9 @@
           </a:lstStyle>
           <a:p>
             <a:r>
-              <a:rPr lang="zh-TW" altLang="en-US" smtClean="0"/>
+              <a:rPr lang="zh-TW" altLang="en-US"/>
               <a:t>按一下以編輯母片標題樣式</a:t>
             </a:r>
-            <a:endParaRPr lang="zh-TW" altLang="en-US"/>
           </a:p>
         </p:txBody>
       </p:sp>
@@ -2073,8 +2075,8 @@
         </p:nvSpPr>
         <p:spPr>
           <a:xfrm>
-            <a:off x="3575050" y="273050"/>
-            <a:ext cx="5111750" cy="5853113"/>
+            <a:off x="4766733" y="273051"/>
+            <a:ext cx="6815667" cy="5853113"/>
           </a:xfrm>
         </p:spPr>
         <p:txBody>
@@ -2111,38 +2113,37 @@
           <a:p>
             <a:pPr lvl="0"/>
             <a:r>
-              <a:rPr lang="zh-TW" altLang="en-US" smtClean="0"/>
+              <a:rPr lang="zh-TW" altLang="en-US"/>
               <a:t>按一下以編輯母片文字樣式</a:t>
             </a:r>
           </a:p>
           <a:p>
             <a:pPr lvl="1"/>
             <a:r>
-              <a:rPr lang="zh-TW" altLang="en-US" smtClean="0"/>
+              <a:rPr lang="zh-TW" altLang="en-US"/>
               <a:t>第二層</a:t>
             </a:r>
           </a:p>
           <a:p>
             <a:pPr lvl="2"/>
             <a:r>
-              <a:rPr lang="zh-TW" altLang="en-US" smtClean="0"/>
+              <a:rPr lang="zh-TW" altLang="en-US"/>
               <a:t>第三層</a:t>
             </a:r>
           </a:p>
           <a:p>
             <a:pPr lvl="3"/>
             <a:r>
-              <a:rPr lang="zh-TW" altLang="en-US" smtClean="0"/>
+              <a:rPr lang="zh-TW" altLang="en-US"/>
               <a:t>第四層</a:t>
             </a:r>
           </a:p>
           <a:p>
             <a:pPr lvl="4"/>
             <a:r>
-              <a:rPr lang="zh-TW" altLang="en-US" smtClean="0"/>
+              <a:rPr lang="zh-TW" altLang="en-US"/>
               <a:t>第五層</a:t>
             </a:r>
-            <a:endParaRPr lang="zh-TW" altLang="en-US"/>
           </a:p>
         </p:txBody>
       </p:sp>
@@ -2158,8 +2159,8 @@
         </p:nvSpPr>
         <p:spPr>
           <a:xfrm>
-            <a:off x="457200" y="1435100"/>
-            <a:ext cx="3008313" cy="4691063"/>
+            <a:off x="609601" y="1435101"/>
+            <a:ext cx="4011084" cy="4691063"/>
           </a:xfrm>
         </p:spPr>
         <p:txBody>
@@ -2205,7 +2206,7 @@
           <a:p>
             <a:pPr lvl="0"/>
             <a:r>
-              <a:rPr lang="zh-TW" altLang="en-US" smtClean="0"/>
+              <a:rPr lang="zh-TW" altLang="en-US"/>
               <a:t>按一下以編輯母片文字樣式</a:t>
             </a:r>
           </a:p>
@@ -2229,7 +2230,7 @@
             <a:fld id="{D9E4721A-3BB7-4288-B001-4FB03A7092AD}" type="datetimeFigureOut">
               <a:rPr lang="en-US" smtClean="0"/>
               <a:pPr/>
-              <a:t>5/26/2018</a:t>
+              <a:t>7/19/2025</a:t>
             </a:fld>
             <a:endParaRPr lang="en-US"/>
           </a:p>
@@ -2315,8 +2316,8 @@
         </p:nvSpPr>
         <p:spPr>
           <a:xfrm>
-            <a:off x="1792288" y="4800600"/>
-            <a:ext cx="5486400" cy="566738"/>
+            <a:off x="2389717" y="4800600"/>
+            <a:ext cx="7315200" cy="566738"/>
           </a:xfrm>
         </p:spPr>
         <p:txBody>
@@ -2328,10 +2329,9 @@
           </a:lstStyle>
           <a:p>
             <a:r>
-              <a:rPr lang="zh-TW" altLang="en-US" smtClean="0"/>
+              <a:rPr lang="zh-TW" altLang="en-US"/>
               <a:t>按一下以編輯母片標題樣式</a:t>
             </a:r>
-            <a:endParaRPr lang="zh-TW" altLang="en-US"/>
           </a:p>
         </p:txBody>
       </p:sp>
@@ -2347,8 +2347,8 @@
         </p:nvSpPr>
         <p:spPr>
           <a:xfrm>
-            <a:off x="1792288" y="612775"/>
-            <a:ext cx="5486400" cy="4114800"/>
+            <a:off x="2389717" y="612775"/>
+            <a:ext cx="7315200" cy="4114800"/>
           </a:xfrm>
         </p:spPr>
         <p:txBody>
@@ -2393,10 +2393,9 @@
           </a:lstStyle>
           <a:p>
             <a:r>
-              <a:rPr lang="zh-TW" altLang="en-US" smtClean="0"/>
+              <a:rPr lang="zh-TW" altLang="en-US"/>
               <a:t>按一下圖示以新增圖片</a:t>
             </a:r>
-            <a:endParaRPr lang="zh-TW" altLang="en-US"/>
           </a:p>
         </p:txBody>
       </p:sp>
@@ -2412,8 +2411,8 @@
         </p:nvSpPr>
         <p:spPr>
           <a:xfrm>
-            <a:off x="1792288" y="5367338"/>
-            <a:ext cx="5486400" cy="804862"/>
+            <a:off x="2389717" y="5367338"/>
+            <a:ext cx="7315200" cy="804862"/>
           </a:xfrm>
         </p:spPr>
         <p:txBody>
@@ -2459,7 +2458,7 @@
           <a:p>
             <a:pPr lvl="0"/>
             <a:r>
-              <a:rPr lang="zh-TW" altLang="en-US" smtClean="0"/>
+              <a:rPr lang="zh-TW" altLang="en-US"/>
               <a:t>按一下以編輯母片文字樣式</a:t>
             </a:r>
           </a:p>
@@ -2483,7 +2482,7 @@
             <a:fld id="{D9E4721A-3BB7-4288-B001-4FB03A7092AD}" type="datetimeFigureOut">
               <a:rPr lang="en-US" smtClean="0"/>
               <a:pPr/>
-              <a:t>5/26/2018</a:t>
+              <a:t>7/19/2025</a:t>
             </a:fld>
             <a:endParaRPr lang="en-US"/>
           </a:p>
@@ -2579,8 +2578,8 @@
         </p:nvSpPr>
         <p:spPr>
           <a:xfrm>
-            <a:off x="457200" y="274638"/>
-            <a:ext cx="8229600" cy="1143000"/>
+            <a:off x="609600" y="274638"/>
+            <a:ext cx="10972800" cy="1143000"/>
           </a:xfrm>
           <a:prstGeom prst="rect">
             <a:avLst/>
@@ -2593,10 +2592,9 @@
           <a:lstStyle/>
           <a:p>
             <a:r>
-              <a:rPr lang="zh-TW" altLang="en-US" smtClean="0"/>
+              <a:rPr lang="zh-TW" altLang="en-US"/>
               <a:t>按一下以編輯母片標題樣式</a:t>
             </a:r>
-            <a:endParaRPr lang="zh-TW" altLang="en-US"/>
           </a:p>
         </p:txBody>
       </p:sp>
@@ -2612,8 +2610,8 @@
         </p:nvSpPr>
         <p:spPr>
           <a:xfrm>
-            <a:off x="457200" y="1600200"/>
-            <a:ext cx="8229600" cy="4525963"/>
+            <a:off x="609600" y="1600201"/>
+            <a:ext cx="10972800" cy="4525963"/>
           </a:xfrm>
           <a:prstGeom prst="rect">
             <a:avLst/>
@@ -2627,38 +2625,37 @@
           <a:p>
             <a:pPr lvl="0"/>
             <a:r>
-              <a:rPr lang="zh-TW" altLang="en-US" smtClean="0"/>
+              <a:rPr lang="zh-TW" altLang="en-US"/>
               <a:t>按一下以編輯母片文字樣式</a:t>
             </a:r>
           </a:p>
           <a:p>
             <a:pPr lvl="1"/>
             <a:r>
-              <a:rPr lang="zh-TW" altLang="en-US" smtClean="0"/>
+              <a:rPr lang="zh-TW" altLang="en-US"/>
               <a:t>第二層</a:t>
             </a:r>
           </a:p>
           <a:p>
             <a:pPr lvl="2"/>
             <a:r>
-              <a:rPr lang="zh-TW" altLang="en-US" smtClean="0"/>
+              <a:rPr lang="zh-TW" altLang="en-US"/>
               <a:t>第三層</a:t>
             </a:r>
           </a:p>
           <a:p>
             <a:pPr lvl="3"/>
             <a:r>
-              <a:rPr lang="zh-TW" altLang="en-US" smtClean="0"/>
+              <a:rPr lang="zh-TW" altLang="en-US"/>
               <a:t>第四層</a:t>
             </a:r>
           </a:p>
           <a:p>
             <a:pPr lvl="4"/>
             <a:r>
-              <a:rPr lang="zh-TW" altLang="en-US" smtClean="0"/>
+              <a:rPr lang="zh-TW" altLang="en-US"/>
               <a:t>第五層</a:t>
             </a:r>
-            <a:endParaRPr lang="zh-TW" altLang="en-US"/>
           </a:p>
         </p:txBody>
       </p:sp>
@@ -2674,8 +2671,8 @@
         </p:nvSpPr>
         <p:spPr>
           <a:xfrm>
-            <a:off x="457200" y="6356350"/>
-            <a:ext cx="2133600" cy="365125"/>
+            <a:off x="609600" y="6356351"/>
+            <a:ext cx="2844800" cy="365125"/>
           </a:xfrm>
           <a:prstGeom prst="rect">
             <a:avLst/>
@@ -2698,7 +2695,7 @@
             <a:fld id="{D9E4721A-3BB7-4288-B001-4FB03A7092AD}" type="datetimeFigureOut">
               <a:rPr lang="en-US" smtClean="0"/>
               <a:pPr/>
-              <a:t>5/26/2018</a:t>
+              <a:t>7/19/2025</a:t>
             </a:fld>
             <a:endParaRPr lang="en-US"/>
           </a:p>
@@ -2716,8 +2713,8 @@
         </p:nvSpPr>
         <p:spPr>
           <a:xfrm>
-            <a:off x="3124200" y="6356350"/>
-            <a:ext cx="2895600" cy="365125"/>
+            <a:off x="4165600" y="6356351"/>
+            <a:ext cx="3860800" cy="365125"/>
           </a:xfrm>
           <a:prstGeom prst="rect">
             <a:avLst/>
@@ -2753,8 +2750,8 @@
         </p:nvSpPr>
         <p:spPr>
           <a:xfrm>
-            <a:off x="6553200" y="6356350"/>
-            <a:ext cx="2133600" cy="365125"/>
+            <a:off x="8737600" y="6356351"/>
+            <a:ext cx="2844800" cy="365125"/>
           </a:xfrm>
           <a:prstGeom prst="rect">
             <a:avLst/>
@@ -3071,7 +3068,7 @@
       </p:grpSpPr>
       <p:sp>
         <p:nvSpPr>
-          <p:cNvPr id="4" name="Title 3"/>
+          <p:cNvPr id="4" name="標題 3"/>
           <p:cNvSpPr>
             <a:spLocks noGrp="1"/>
           </p:cNvSpPr>
@@ -3079,118 +3076,35 @@
             <p:ph type="title"/>
           </p:nvPr>
         </p:nvSpPr>
-        <p:spPr/>
-        <p:txBody>
-          <a:bodyPr/>
-          <a:lstStyle/>
-          <a:p>
-            <a:pPr>
-              <a:defRPr/>
-            </a:pPr>
-            <a:r>
-              <a:rPr lang="zh-TW" altLang="en-US" b="1" dirty="0" smtClean="0">
+        <p:spPr>
+          <a:xfrm>
+            <a:off x="0" y="2660915"/>
+            <a:ext cx="12192000" cy="1143000"/>
+          </a:xfrm>
+        </p:spPr>
+        <p:txBody>
+          <a:bodyPr>
+            <a:noAutofit/>
+          </a:bodyPr>
+          <a:lstStyle/>
+          <a:p>
+            <a:r>
+              <a:rPr lang="zh-TW" altLang="en-US" sz="7200" b="1" i="1" dirty="0">
                 <a:solidFill>
                   <a:srgbClr val="660033"/>
                 </a:solidFill>
+                <a:effectLst>
+                  <a:outerShdw blurRad="38100" dist="38100" dir="2700000" algn="tl">
+                    <a:srgbClr val="000000">
+                      <a:alpha val="43137"/>
+                    </a:srgbClr>
+                  </a:outerShdw>
+                </a:effectLst>
                 <a:latin typeface="微軟正黑體" pitchFamily="34" charset="-120"/>
                 <a:ea typeface="微軟正黑體" pitchFamily="34" charset="-120"/>
               </a:rPr>
               <a:t>愛使我們相聚一起</a:t>
             </a:r>
-          </a:p>
-        </p:txBody>
-      </p:sp>
-      <p:sp>
-        <p:nvSpPr>
-          <p:cNvPr id="5" name="Content Placeholder 4"/>
-          <p:cNvSpPr>
-            <a:spLocks noGrp="1"/>
-          </p:cNvSpPr>
-          <p:nvPr>
-            <p:ph idx="1"/>
-          </p:nvPr>
-        </p:nvSpPr>
-        <p:spPr/>
-        <p:txBody>
-          <a:bodyPr>
-            <a:normAutofit/>
-          </a:bodyPr>
-          <a:lstStyle/>
-          <a:p>
-            <a:pPr algn="ctr">
-              <a:buNone/>
-              <a:defRPr/>
-            </a:pPr>
-            <a:r>
-              <a:rPr lang="zh-TW" altLang="en-US" sz="5400" b="1" spc="50" dirty="0" smtClean="0">
-                <a:ln w="11430"/>
-                <a:solidFill>
-                  <a:srgbClr val="660033"/>
-                </a:solidFill>
-                <a:latin typeface="微軟正黑體" pitchFamily="34" charset="-120"/>
-                <a:ea typeface="微軟正黑體" pitchFamily="34" charset="-120"/>
-              </a:rPr>
-              <a:t>愛使我們相聚一起</a:t>
-            </a:r>
-          </a:p>
-          <a:p>
-            <a:pPr algn="ctr">
-              <a:buNone/>
-              <a:defRPr/>
-            </a:pPr>
-            <a:r>
-              <a:rPr lang="zh-TW" altLang="en-US" sz="5400" b="1" spc="50" dirty="0" smtClean="0">
-                <a:ln w="11430"/>
-                <a:solidFill>
-                  <a:srgbClr val="660033"/>
-                </a:solidFill>
-                <a:latin typeface="微軟正黑體" pitchFamily="34" charset="-120"/>
-                <a:ea typeface="微軟正黑體" pitchFamily="34" charset="-120"/>
-              </a:rPr>
-              <a:t>愛使我們相聚一起</a:t>
-            </a:r>
-          </a:p>
-          <a:p>
-            <a:pPr algn="ctr">
-              <a:buNone/>
-              <a:defRPr/>
-            </a:pPr>
-            <a:r>
-              <a:rPr lang="zh-TW" altLang="en-US" sz="5400" b="1" spc="50" dirty="0" smtClean="0">
-                <a:ln w="11430"/>
-                <a:solidFill>
-                  <a:srgbClr val="660033"/>
-                </a:solidFill>
-                <a:latin typeface="微軟正黑體" pitchFamily="34" charset="-120"/>
-                <a:ea typeface="微軟正黑體" pitchFamily="34" charset="-120"/>
-              </a:rPr>
-              <a:t>上帝的愛使我們合而為一</a:t>
-            </a:r>
-          </a:p>
-          <a:p>
-            <a:pPr algn="ctr">
-              <a:buNone/>
-              <a:defRPr/>
-            </a:pPr>
-            <a:r>
-              <a:rPr lang="zh-TW" altLang="en-US" sz="5400" b="1" spc="50" dirty="0" smtClean="0">
-                <a:ln w="11430"/>
-                <a:solidFill>
-                  <a:srgbClr val="660033"/>
-                </a:solidFill>
-                <a:latin typeface="微軟正黑體" pitchFamily="34" charset="-120"/>
-                <a:ea typeface="微軟正黑體" pitchFamily="34" charset="-120"/>
-              </a:rPr>
-              <a:t>愛使我們相聚一起</a:t>
-            </a:r>
-            <a:endParaRPr lang="zh-TW" altLang="en-US" sz="5400" b="1" spc="50" dirty="0">
-              <a:ln w="11430"/>
-              <a:solidFill>
-                <a:srgbClr val="660033"/>
-              </a:solidFill>
-              <a:latin typeface="微軟正黑體" pitchFamily="34" charset="-120"/>
-              <a:ea typeface="微軟正黑體" pitchFamily="34" charset="-120"/>
-            </a:endParaRPr>
           </a:p>
         </p:txBody>
       </p:sp>
@@ -3221,24 +3135,31 @@
       </p:grpSpPr>
       <p:sp>
         <p:nvSpPr>
-          <p:cNvPr id="4" name="Title 3"/>
-          <p:cNvSpPr>
-            <a:spLocks noGrp="1"/>
-          </p:cNvSpPr>
-          <p:nvPr>
-            <p:ph type="title"/>
-          </p:nvPr>
-        </p:nvSpPr>
-        <p:spPr/>
-        <p:txBody>
-          <a:bodyPr/>
-          <a:lstStyle/>
-          <a:p>
-            <a:pPr>
-              <a:defRPr/>
+          <p:cNvPr id="5" name="內容版面配置區 4"/>
+          <p:cNvSpPr>
+            <a:spLocks noGrp="1"/>
+          </p:cNvSpPr>
+          <p:nvPr>
+            <p:ph idx="1"/>
+          </p:nvPr>
+        </p:nvSpPr>
+        <p:spPr>
+          <a:xfrm>
+            <a:off x="0" y="2084851"/>
+            <a:ext cx="12192000" cy="2404863"/>
+          </a:xfrm>
+        </p:spPr>
+        <p:txBody>
+          <a:bodyPr anchor="ctr">
+            <a:normAutofit/>
+          </a:bodyPr>
+          <a:lstStyle/>
+          <a:p>
+            <a:pPr algn="ctr">
+              <a:buNone/>
             </a:pPr>
             <a:r>
-              <a:rPr lang="zh-TW" altLang="en-US" b="1" dirty="0" smtClean="0">
+              <a:rPr lang="zh-TW" altLang="en-US" sz="6400" b="1" dirty="0">
                 <a:solidFill>
                   <a:srgbClr val="660033"/>
                 </a:solidFill>
@@ -3248,11 +3169,126 @@
               <a:t>愛使我們相聚一起</a:t>
             </a:r>
           </a:p>
-        </p:txBody>
-      </p:sp>
-      <p:sp>
-        <p:nvSpPr>
-          <p:cNvPr id="5" name="Content Placeholder 4"/>
+          <a:p>
+            <a:pPr algn="ctr">
+              <a:buNone/>
+            </a:pPr>
+            <a:r>
+              <a:rPr lang="zh-TW" altLang="en-US" sz="6400" b="1" dirty="0">
+                <a:solidFill>
+                  <a:srgbClr val="660033"/>
+                </a:solidFill>
+                <a:latin typeface="微軟正黑體" pitchFamily="34" charset="-120"/>
+                <a:ea typeface="微軟正黑體" pitchFamily="34" charset="-120"/>
+              </a:rPr>
+              <a:t>愛使我們相聚一起</a:t>
+            </a:r>
+          </a:p>
+        </p:txBody>
+      </p:sp>
+      <p:sp>
+        <p:nvSpPr>
+          <p:cNvPr id="3" name="TextBox 2"/>
+          <p:cNvSpPr txBox="1"/>
+          <p:nvPr/>
+        </p:nvSpPr>
+        <p:spPr>
+          <a:xfrm>
+            <a:off x="0" y="5157193"/>
+            <a:ext cx="12192000" cy="584775"/>
+          </a:xfrm>
+          <a:prstGeom prst="rect">
+            <a:avLst/>
+          </a:prstGeom>
+          <a:noFill/>
+        </p:spPr>
+        <p:txBody>
+          <a:bodyPr wrap="square" rtlCol="0">
+            <a:spAutoFit/>
+          </a:bodyPr>
+          <a:lstStyle/>
+          <a:p>
+            <a:pPr algn="ctr"/>
+            <a:r>
+              <a:rPr lang="en-US" sz="3200" b="1" dirty="0">
+                <a:solidFill>
+                  <a:srgbClr val="660033"/>
+                </a:solidFill>
+                <a:latin typeface="+mj-lt"/>
+                <a:ea typeface="Microsoft JhengHei" panose="020B0604030504040204" pitchFamily="34" charset="-120"/>
+              </a:rPr>
+              <a:t>( </a:t>
+            </a:r>
+            <a:r>
+              <a:rPr lang="en-US" altLang="zh-CN" sz="3200" b="1" dirty="0">
+                <a:solidFill>
+                  <a:srgbClr val="660033"/>
+                </a:solidFill>
+                <a:latin typeface="+mj-lt"/>
+                <a:ea typeface="Microsoft JhengHei" panose="020B0604030504040204" pitchFamily="34" charset="-120"/>
+              </a:rPr>
+              <a:t>1 / 2</a:t>
+            </a:r>
+            <a:r>
+              <a:rPr lang="en-US" sz="3200" b="1" dirty="0">
+                <a:solidFill>
+                  <a:srgbClr val="660033"/>
+                </a:solidFill>
+                <a:latin typeface="+mj-lt"/>
+                <a:ea typeface="Microsoft JhengHei" panose="020B0604030504040204" pitchFamily="34" charset="-120"/>
+              </a:rPr>
+              <a:t> )</a:t>
+            </a:r>
+            <a:endParaRPr lang="vi-VN" sz="3200" b="1" dirty="0">
+              <a:solidFill>
+                <a:srgbClr val="660033"/>
+              </a:solidFill>
+              <a:latin typeface="+mj-lt"/>
+              <a:ea typeface="Microsoft JhengHei" panose="020B0604030504040204" pitchFamily="34" charset="-120"/>
+            </a:endParaRPr>
+          </a:p>
+        </p:txBody>
+      </p:sp>
+    </p:spTree>
+  </p:cSld>
+  <p:clrMapOvr>
+    <a:masterClrMapping/>
+  </p:clrMapOvr>
+</p:sld>
+</file>
+
+<file path=ppt/slides/slide3.xml><?xml version="1.0" encoding="utf-8"?>
+<p:sld xmlns:a="http://schemas.openxmlformats.org/drawingml/2006/main" xmlns:r="http://schemas.openxmlformats.org/officeDocument/2006/relationships" xmlns:p="http://schemas.openxmlformats.org/presentationml/2006/main">
+  <p:cSld>
+    <p:spTree>
+      <p:nvGrpSpPr>
+        <p:cNvPr id="1" name="">
+          <a:extLst>
+            <a:ext uri="{FF2B5EF4-FFF2-40B4-BE49-F238E27FC236}">
+              <a16:creationId xmlns:a16="http://schemas.microsoft.com/office/drawing/2014/main" id="{34F8DDD0-9A70-7095-37FF-45A78949958D}"/>
+            </a:ext>
+          </a:extLst>
+        </p:cNvPr>
+        <p:cNvGrpSpPr/>
+        <p:nvPr/>
+      </p:nvGrpSpPr>
+      <p:grpSpPr>
+        <a:xfrm>
+          <a:off x="0" y="0"/>
+          <a:ext cx="0" cy="0"/>
+          <a:chOff x="0" y="0"/>
+          <a:chExt cx="0" cy="0"/>
+        </a:xfrm>
+      </p:grpSpPr>
+      <p:sp>
+        <p:nvSpPr>
+          <p:cNvPr id="5" name="內容版面配置區 4">
+            <a:extLst>
+              <a:ext uri="{FF2B5EF4-FFF2-40B4-BE49-F238E27FC236}">
+                <a16:creationId xmlns:a16="http://schemas.microsoft.com/office/drawing/2014/main" id="{6C17C5A2-1290-7516-33D1-4CD503831695}"/>
+              </a:ext>
+            </a:extLst>
+          </p:cNvPr>
           <p:cNvSpPr>
             <a:spLocks noGrp="1"/>
           </p:cNvSpPr>
@@ -3260,20 +3296,187 @@
             <p:ph idx="1"/>
           </p:nvPr>
         </p:nvSpPr>
-        <p:spPr/>
-        <p:txBody>
-          <a:bodyPr>
+        <p:spPr>
+          <a:xfrm>
+            <a:off x="0" y="2084851"/>
+            <a:ext cx="12192000" cy="2404863"/>
+          </a:xfrm>
+        </p:spPr>
+        <p:txBody>
+          <a:bodyPr anchor="ctr">
             <a:normAutofit/>
           </a:bodyPr>
           <a:lstStyle/>
           <a:p>
             <a:pPr algn="ctr">
               <a:buNone/>
-              <a:defRPr/>
             </a:pPr>
             <a:r>
-              <a:rPr lang="zh-TW" altLang="en-US" sz="5400" b="1" spc="50" dirty="0" smtClean="0">
-                <a:ln w="11430"/>
+              <a:rPr lang="zh-TW" altLang="en-US" sz="6400" b="1" dirty="0">
+                <a:solidFill>
+                  <a:srgbClr val="660033"/>
+                </a:solidFill>
+                <a:latin typeface="微軟正黑體" pitchFamily="34" charset="-120"/>
+                <a:ea typeface="微軟正黑體" pitchFamily="34" charset="-120"/>
+              </a:rPr>
+              <a:t>上帝的愛使我們合而為一</a:t>
+            </a:r>
+          </a:p>
+          <a:p>
+            <a:pPr algn="ctr">
+              <a:buNone/>
+            </a:pPr>
+            <a:r>
+              <a:rPr lang="zh-TW" altLang="en-US" sz="6400" b="1" dirty="0">
+                <a:solidFill>
+                  <a:srgbClr val="660033"/>
+                </a:solidFill>
+                <a:latin typeface="微軟正黑體" pitchFamily="34" charset="-120"/>
+                <a:ea typeface="微軟正黑體" pitchFamily="34" charset="-120"/>
+              </a:rPr>
+              <a:t>愛使我們相聚一起</a:t>
+            </a:r>
+          </a:p>
+        </p:txBody>
+      </p:sp>
+      <p:sp>
+        <p:nvSpPr>
+          <p:cNvPr id="3" name="TextBox 2">
+            <a:extLst>
+              <a:ext uri="{FF2B5EF4-FFF2-40B4-BE49-F238E27FC236}">
+                <a16:creationId xmlns:a16="http://schemas.microsoft.com/office/drawing/2014/main" id="{3255BB1D-6BD0-28E4-E8A5-FB068B9CADD6}"/>
+              </a:ext>
+            </a:extLst>
+          </p:cNvPr>
+          <p:cNvSpPr txBox="1"/>
+          <p:nvPr/>
+        </p:nvSpPr>
+        <p:spPr>
+          <a:xfrm>
+            <a:off x="0" y="5157193"/>
+            <a:ext cx="12192000" cy="584775"/>
+          </a:xfrm>
+          <a:prstGeom prst="rect">
+            <a:avLst/>
+          </a:prstGeom>
+          <a:noFill/>
+        </p:spPr>
+        <p:txBody>
+          <a:bodyPr wrap="square" rtlCol="0">
+            <a:spAutoFit/>
+          </a:bodyPr>
+          <a:lstStyle/>
+          <a:p>
+            <a:pPr algn="ctr"/>
+            <a:r>
+              <a:rPr lang="en-US" sz="3200" b="1" dirty="0">
+                <a:solidFill>
+                  <a:srgbClr val="660033"/>
+                </a:solidFill>
+                <a:latin typeface="+mj-lt"/>
+                <a:ea typeface="Microsoft JhengHei" panose="020B0604030504040204" pitchFamily="34" charset="-120"/>
+              </a:rPr>
+              <a:t>( </a:t>
+            </a:r>
+            <a:r>
+              <a:rPr lang="en-US" altLang="zh-CN" sz="3200" b="1" dirty="0">
+                <a:solidFill>
+                  <a:srgbClr val="660033"/>
+                </a:solidFill>
+                <a:latin typeface="+mj-lt"/>
+                <a:ea typeface="Microsoft JhengHei" panose="020B0604030504040204" pitchFamily="34" charset="-120"/>
+              </a:rPr>
+              <a:t>1 / 2</a:t>
+            </a:r>
+            <a:r>
+              <a:rPr lang="en-US" sz="3200" b="1" dirty="0">
+                <a:solidFill>
+                  <a:srgbClr val="660033"/>
+                </a:solidFill>
+                <a:latin typeface="+mj-lt"/>
+                <a:ea typeface="Microsoft JhengHei" panose="020B0604030504040204" pitchFamily="34" charset="-120"/>
+              </a:rPr>
+              <a:t> )</a:t>
+            </a:r>
+            <a:endParaRPr lang="vi-VN" sz="3200" b="1" dirty="0">
+              <a:solidFill>
+                <a:srgbClr val="660033"/>
+              </a:solidFill>
+              <a:latin typeface="+mj-lt"/>
+              <a:ea typeface="Microsoft JhengHei" panose="020B0604030504040204" pitchFamily="34" charset="-120"/>
+            </a:endParaRPr>
+          </a:p>
+        </p:txBody>
+      </p:sp>
+    </p:spTree>
+    <p:extLst>
+      <p:ext uri="{BB962C8B-B14F-4D97-AF65-F5344CB8AC3E}">
+        <p14:creationId xmlns:p14="http://schemas.microsoft.com/office/powerpoint/2010/main" val="2283163741"/>
+      </p:ext>
+    </p:extLst>
+  </p:cSld>
+  <p:clrMapOvr>
+    <a:masterClrMapping/>
+  </p:clrMapOvr>
+</p:sld>
+</file>
+
+<file path=ppt/slides/slide4.xml><?xml version="1.0" encoding="utf-8"?>
+<p:sld xmlns:a="http://schemas.openxmlformats.org/drawingml/2006/main" xmlns:r="http://schemas.openxmlformats.org/officeDocument/2006/relationships" xmlns:p="http://schemas.openxmlformats.org/presentationml/2006/main">
+  <p:cSld>
+    <p:spTree>
+      <p:nvGrpSpPr>
+        <p:cNvPr id="1" name="">
+          <a:extLst>
+            <a:ext uri="{FF2B5EF4-FFF2-40B4-BE49-F238E27FC236}">
+              <a16:creationId xmlns:a16="http://schemas.microsoft.com/office/drawing/2014/main" id="{D6F07F6F-C983-2B2D-399D-A69B1B4B3495}"/>
+            </a:ext>
+          </a:extLst>
+        </p:cNvPr>
+        <p:cNvGrpSpPr/>
+        <p:nvPr/>
+      </p:nvGrpSpPr>
+      <p:grpSpPr>
+        <a:xfrm>
+          <a:off x="0" y="0"/>
+          <a:ext cx="0" cy="0"/>
+          <a:chOff x="0" y="0"/>
+          <a:chExt cx="0" cy="0"/>
+        </a:xfrm>
+      </p:grpSpPr>
+      <p:sp>
+        <p:nvSpPr>
+          <p:cNvPr id="5" name="內容版面配置區 4">
+            <a:extLst>
+              <a:ext uri="{FF2B5EF4-FFF2-40B4-BE49-F238E27FC236}">
+                <a16:creationId xmlns:a16="http://schemas.microsoft.com/office/drawing/2014/main" id="{4C69B27F-EF78-D76C-7732-B4931C6F17E4}"/>
+              </a:ext>
+            </a:extLst>
+          </p:cNvPr>
+          <p:cNvSpPr>
+            <a:spLocks noGrp="1"/>
+          </p:cNvSpPr>
+          <p:nvPr>
+            <p:ph idx="1"/>
+          </p:nvPr>
+        </p:nvSpPr>
+        <p:spPr>
+          <a:xfrm>
+            <a:off x="0" y="2084851"/>
+            <a:ext cx="12192000" cy="2404863"/>
+          </a:xfrm>
+        </p:spPr>
+        <p:txBody>
+          <a:bodyPr anchor="ctr">
+            <a:normAutofit/>
+          </a:bodyPr>
+          <a:lstStyle/>
+          <a:p>
+            <a:pPr algn="ctr">
+              <a:buNone/>
+            </a:pPr>
+            <a:r>
+              <a:rPr lang="zh-TW" altLang="en-US" sz="6400" b="1" dirty="0">
                 <a:solidFill>
                   <a:srgbClr val="660033"/>
                 </a:solidFill>
@@ -3286,11 +3489,9 @@
           <a:p>
             <a:pPr algn="ctr">
               <a:buNone/>
-              <a:defRPr/>
             </a:pPr>
             <a:r>
-              <a:rPr lang="zh-TW" altLang="en-US" sz="5400" b="1" spc="50" dirty="0" smtClean="0">
-                <a:ln w="11430"/>
+              <a:rPr lang="zh-TW" altLang="en-US" sz="6400" b="1" dirty="0">
                 <a:solidFill>
                   <a:srgbClr val="660033"/>
                 </a:solidFill>
@@ -3300,14 +3501,146 @@
               <a:t>讓主愛從我們開始</a:t>
             </a:r>
           </a:p>
+        </p:txBody>
+      </p:sp>
+      <p:sp>
+        <p:nvSpPr>
+          <p:cNvPr id="3" name="TextBox 2">
+            <a:extLst>
+              <a:ext uri="{FF2B5EF4-FFF2-40B4-BE49-F238E27FC236}">
+                <a16:creationId xmlns:a16="http://schemas.microsoft.com/office/drawing/2014/main" id="{D4331FD1-8DE5-E419-BB84-F8E1CD526C4A}"/>
+              </a:ext>
+            </a:extLst>
+          </p:cNvPr>
+          <p:cNvSpPr txBox="1"/>
+          <p:nvPr/>
+        </p:nvSpPr>
+        <p:spPr>
+          <a:xfrm>
+            <a:off x="0" y="5157193"/>
+            <a:ext cx="12192000" cy="584775"/>
+          </a:xfrm>
+          <a:prstGeom prst="rect">
+            <a:avLst/>
+          </a:prstGeom>
+          <a:noFill/>
+        </p:spPr>
+        <p:txBody>
+          <a:bodyPr wrap="square" rtlCol="0">
+            <a:spAutoFit/>
+          </a:bodyPr>
+          <a:lstStyle/>
+          <a:p>
+            <a:pPr algn="ctr"/>
+            <a:r>
+              <a:rPr lang="en-US" sz="3200" b="1" dirty="0">
+                <a:solidFill>
+                  <a:srgbClr val="660033"/>
+                </a:solidFill>
+                <a:latin typeface="+mj-lt"/>
+                <a:ea typeface="Microsoft JhengHei" panose="020B0604030504040204" pitchFamily="34" charset="-120"/>
+              </a:rPr>
+              <a:t>( </a:t>
+            </a:r>
+            <a:r>
+              <a:rPr lang="en-US" altLang="zh-CN" sz="3200" b="1" dirty="0">
+                <a:solidFill>
+                  <a:srgbClr val="660033"/>
+                </a:solidFill>
+                <a:latin typeface="+mj-lt"/>
+                <a:ea typeface="Microsoft JhengHei" panose="020B0604030504040204" pitchFamily="34" charset="-120"/>
+              </a:rPr>
+              <a:t>2 / 2</a:t>
+            </a:r>
+            <a:r>
+              <a:rPr lang="en-US" sz="3200" b="1" dirty="0">
+                <a:solidFill>
+                  <a:srgbClr val="660033"/>
+                </a:solidFill>
+                <a:latin typeface="+mj-lt"/>
+                <a:ea typeface="Microsoft JhengHei" panose="020B0604030504040204" pitchFamily="34" charset="-120"/>
+              </a:rPr>
+              <a:t> )</a:t>
+            </a:r>
+            <a:endParaRPr lang="vi-VN" sz="3200" b="1" dirty="0">
+              <a:solidFill>
+                <a:srgbClr val="660033"/>
+              </a:solidFill>
+              <a:latin typeface="+mj-lt"/>
+              <a:ea typeface="Microsoft JhengHei" panose="020B0604030504040204" pitchFamily="34" charset="-120"/>
+            </a:endParaRPr>
+          </a:p>
+        </p:txBody>
+      </p:sp>
+    </p:spTree>
+    <p:extLst>
+      <p:ext uri="{BB962C8B-B14F-4D97-AF65-F5344CB8AC3E}">
+        <p14:creationId xmlns:p14="http://schemas.microsoft.com/office/powerpoint/2010/main" val="4166243385"/>
+      </p:ext>
+    </p:extLst>
+  </p:cSld>
+  <p:clrMapOvr>
+    <a:masterClrMapping/>
+  </p:clrMapOvr>
+</p:sld>
+</file>
+
+<file path=ppt/slides/slide5.xml><?xml version="1.0" encoding="utf-8"?>
+<p:sld xmlns:a="http://schemas.openxmlformats.org/drawingml/2006/main" xmlns:r="http://schemas.openxmlformats.org/officeDocument/2006/relationships" xmlns:p="http://schemas.openxmlformats.org/presentationml/2006/main">
+  <p:cSld>
+    <p:spTree>
+      <p:nvGrpSpPr>
+        <p:cNvPr id="1" name="">
+          <a:extLst>
+            <a:ext uri="{FF2B5EF4-FFF2-40B4-BE49-F238E27FC236}">
+              <a16:creationId xmlns:a16="http://schemas.microsoft.com/office/drawing/2014/main" id="{35625E38-5193-656F-428C-61D9F10BC09A}"/>
+            </a:ext>
+          </a:extLst>
+        </p:cNvPr>
+        <p:cNvGrpSpPr/>
+        <p:nvPr/>
+      </p:nvGrpSpPr>
+      <p:grpSpPr>
+        <a:xfrm>
+          <a:off x="0" y="0"/>
+          <a:ext cx="0" cy="0"/>
+          <a:chOff x="0" y="0"/>
+          <a:chExt cx="0" cy="0"/>
+        </a:xfrm>
+      </p:grpSpPr>
+      <p:sp>
+        <p:nvSpPr>
+          <p:cNvPr id="5" name="內容版面配置區 4">
+            <a:extLst>
+              <a:ext uri="{FF2B5EF4-FFF2-40B4-BE49-F238E27FC236}">
+                <a16:creationId xmlns:a16="http://schemas.microsoft.com/office/drawing/2014/main" id="{2A7AA137-8A86-06DB-D316-365EB3A95DDA}"/>
+              </a:ext>
+            </a:extLst>
+          </p:cNvPr>
+          <p:cNvSpPr>
+            <a:spLocks noGrp="1"/>
+          </p:cNvSpPr>
+          <p:nvPr>
+            <p:ph idx="1"/>
+          </p:nvPr>
+        </p:nvSpPr>
+        <p:spPr>
+          <a:xfrm>
+            <a:off x="0" y="2084851"/>
+            <a:ext cx="12192000" cy="2404863"/>
+          </a:xfrm>
+        </p:spPr>
+        <p:txBody>
+          <a:bodyPr anchor="ctr">
+            <a:normAutofit/>
+          </a:bodyPr>
+          <a:lstStyle/>
           <a:p>
             <a:pPr algn="ctr">
               <a:buNone/>
-              <a:defRPr/>
             </a:pPr>
             <a:r>
-              <a:rPr lang="zh-TW" altLang="en-US" sz="5400" b="1" spc="50" dirty="0" smtClean="0">
-                <a:ln w="11430"/>
+              <a:rPr lang="zh-TW" altLang="en-US" sz="6400" b="1" dirty="0">
                 <a:solidFill>
                   <a:srgbClr val="660033"/>
                 </a:solidFill>
@@ -3320,11 +3653,9 @@
           <a:p>
             <a:pPr algn="ctr">
               <a:buNone/>
-              <a:defRPr/>
             </a:pPr>
             <a:r>
-              <a:rPr lang="zh-TW" altLang="en-US" sz="5400" b="1" spc="50" dirty="0" smtClean="0">
-                <a:ln w="11430"/>
+              <a:rPr lang="zh-TW" altLang="en-US" sz="6400" b="1" dirty="0">
                 <a:solidFill>
                   <a:srgbClr val="660033"/>
                 </a:solidFill>
@@ -3333,18 +3664,84 @@
               </a:rPr>
               <a:t>愛使我們相聚一起</a:t>
             </a:r>
-            <a:endParaRPr lang="zh-TW" altLang="en-US" sz="5400" b="1" spc="50" dirty="0">
-              <a:ln w="11430"/>
+          </a:p>
+        </p:txBody>
+      </p:sp>
+      <p:sp>
+        <p:nvSpPr>
+          <p:cNvPr id="3" name="TextBox 2">
+            <a:extLst>
+              <a:ext uri="{FF2B5EF4-FFF2-40B4-BE49-F238E27FC236}">
+                <a16:creationId xmlns:a16="http://schemas.microsoft.com/office/drawing/2014/main" id="{EDD22CAE-2B30-60FC-2077-7B488C6CAE47}"/>
+              </a:ext>
+            </a:extLst>
+          </p:cNvPr>
+          <p:cNvSpPr txBox="1"/>
+          <p:nvPr/>
+        </p:nvSpPr>
+        <p:spPr>
+          <a:xfrm>
+            <a:off x="0" y="5157193"/>
+            <a:ext cx="12192000" cy="584775"/>
+          </a:xfrm>
+          <a:prstGeom prst="rect">
+            <a:avLst/>
+          </a:prstGeom>
+          <a:noFill/>
+        </p:spPr>
+        <p:txBody>
+          <a:bodyPr wrap="square" rtlCol="0">
+            <a:spAutoFit/>
+          </a:bodyPr>
+          <a:lstStyle/>
+          <a:p>
+            <a:pPr algn="ctr"/>
+            <a:r>
+              <a:rPr lang="en-US" sz="3200" b="1" dirty="0">
+                <a:solidFill>
+                  <a:srgbClr val="660033"/>
+                </a:solidFill>
+                <a:latin typeface="+mj-lt"/>
+                <a:ea typeface="Microsoft JhengHei" panose="020B0604030504040204" pitchFamily="34" charset="-120"/>
+              </a:rPr>
+              <a:t>( </a:t>
+            </a:r>
+            <a:r>
+              <a:rPr lang="en-US" altLang="zh-CN" sz="3200" b="1" dirty="0">
+                <a:solidFill>
+                  <a:srgbClr val="660033"/>
+                </a:solidFill>
+                <a:latin typeface="+mj-lt"/>
+                <a:ea typeface="Microsoft JhengHei" panose="020B0604030504040204" pitchFamily="34" charset="-120"/>
+              </a:rPr>
+              <a:t>2 / 2</a:t>
+            </a:r>
+            <a:r>
+              <a:rPr lang="en-US" sz="3200" b="1" dirty="0">
+                <a:solidFill>
+                  <a:srgbClr val="660033"/>
+                </a:solidFill>
+                <a:latin typeface="+mj-lt"/>
+                <a:ea typeface="Microsoft JhengHei" panose="020B0604030504040204" pitchFamily="34" charset="-120"/>
+              </a:rPr>
+              <a:t> )</a:t>
+            </a:r>
+            <a:endParaRPr lang="vi-VN" sz="3200" b="1" dirty="0">
               <a:solidFill>
                 <a:srgbClr val="660033"/>
               </a:solidFill>
-              <a:latin typeface="微軟正黑體" pitchFamily="34" charset="-120"/>
-              <a:ea typeface="微軟正黑體" pitchFamily="34" charset="-120"/>
+              <a:latin typeface="+mj-lt"/>
+              <a:ea typeface="Microsoft JhengHei" panose="020B0604030504040204" pitchFamily="34" charset="-120"/>
             </a:endParaRPr>
           </a:p>
         </p:txBody>
       </p:sp>
     </p:spTree>
+    <p:extLst>
+      <p:ext uri="{BB962C8B-B14F-4D97-AF65-F5344CB8AC3E}">
+        <p14:creationId xmlns:p14="http://schemas.microsoft.com/office/powerpoint/2010/main" val="1892499704"/>
+      </p:ext>
+    </p:extLst>
   </p:cSld>
   <p:clrMapOvr>
     <a:masterClrMapping/>
